--- a/docs/_templates/lilo_pallete.pptx
+++ b/docs/_templates/lilo_pallete.pptx
@@ -106,6 +106,11 @@
       </a:defRPr>
     </a:lvl9pPr>
   </p:defaultTextStyle>
+  <p:extLst>
+    <p:ext uri="{EFAFB233-063F-42B5-8137-9DF3F51BA10A}">
+      <p15:sldGuideLst xmlns:p15="http://schemas.microsoft.com/office/powerpoint/2012/main"/>
+    </p:ext>
+  </p:extLst>
 </p:presentation>
 </file>
 
@@ -256,7 +261,7 @@
           <a:p>
             <a:fld id="{0DBDE24C-F83E-4B95-97D0-05E27B78EE15}" type="datetimeFigureOut">
               <a:rPr lang="en-US" smtClean="0"/>
-              <a:t>8/23/2023</a:t>
+              <a:t>6/19/26</a:t>
             </a:fld>
             <a:endParaRPr lang="en-US"/>
           </a:p>
@@ -454,7 +459,7 @@
           <a:p>
             <a:fld id="{0DBDE24C-F83E-4B95-97D0-05E27B78EE15}" type="datetimeFigureOut">
               <a:rPr lang="en-US" smtClean="0"/>
-              <a:t>8/23/2023</a:t>
+              <a:t>6/19/26</a:t>
             </a:fld>
             <a:endParaRPr lang="en-US"/>
           </a:p>
@@ -662,7 +667,7 @@
           <a:p>
             <a:fld id="{0DBDE24C-F83E-4B95-97D0-05E27B78EE15}" type="datetimeFigureOut">
               <a:rPr lang="en-US" smtClean="0"/>
-              <a:t>8/23/2023</a:t>
+              <a:t>6/19/26</a:t>
             </a:fld>
             <a:endParaRPr lang="en-US"/>
           </a:p>
@@ -860,7 +865,7 @@
           <a:p>
             <a:fld id="{0DBDE24C-F83E-4B95-97D0-05E27B78EE15}" type="datetimeFigureOut">
               <a:rPr lang="en-US" smtClean="0"/>
-              <a:t>8/23/2023</a:t>
+              <a:t>6/19/26</a:t>
             </a:fld>
             <a:endParaRPr lang="en-US"/>
           </a:p>
@@ -1135,7 +1140,7 @@
           <a:p>
             <a:fld id="{0DBDE24C-F83E-4B95-97D0-05E27B78EE15}" type="datetimeFigureOut">
               <a:rPr lang="en-US" smtClean="0"/>
-              <a:t>8/23/2023</a:t>
+              <a:t>6/19/26</a:t>
             </a:fld>
             <a:endParaRPr lang="en-US"/>
           </a:p>
@@ -1400,7 +1405,7 @@
           <a:p>
             <a:fld id="{0DBDE24C-F83E-4B95-97D0-05E27B78EE15}" type="datetimeFigureOut">
               <a:rPr lang="en-US" smtClean="0"/>
-              <a:t>8/23/2023</a:t>
+              <a:t>6/19/26</a:t>
             </a:fld>
             <a:endParaRPr lang="en-US"/>
           </a:p>
@@ -1812,7 +1817,7 @@
           <a:p>
             <a:fld id="{0DBDE24C-F83E-4B95-97D0-05E27B78EE15}" type="datetimeFigureOut">
               <a:rPr lang="en-US" smtClean="0"/>
-              <a:t>8/23/2023</a:t>
+              <a:t>6/19/26</a:t>
             </a:fld>
             <a:endParaRPr lang="en-US"/>
           </a:p>
@@ -1953,7 +1958,7 @@
           <a:p>
             <a:fld id="{0DBDE24C-F83E-4B95-97D0-05E27B78EE15}" type="datetimeFigureOut">
               <a:rPr lang="en-US" smtClean="0"/>
-              <a:t>8/23/2023</a:t>
+              <a:t>6/19/26</a:t>
             </a:fld>
             <a:endParaRPr lang="en-US"/>
           </a:p>
@@ -2066,7 +2071,7 @@
           <a:p>
             <a:fld id="{0DBDE24C-F83E-4B95-97D0-05E27B78EE15}" type="datetimeFigureOut">
               <a:rPr lang="en-US" smtClean="0"/>
-              <a:t>8/23/2023</a:t>
+              <a:t>6/19/26</a:t>
             </a:fld>
             <a:endParaRPr lang="en-US"/>
           </a:p>
@@ -2377,7 +2382,7 @@
           <a:p>
             <a:fld id="{0DBDE24C-F83E-4B95-97D0-05E27B78EE15}" type="datetimeFigureOut">
               <a:rPr lang="en-US" smtClean="0"/>
-              <a:t>8/23/2023</a:t>
+              <a:t>6/19/26</a:t>
             </a:fld>
             <a:endParaRPr lang="en-US"/>
           </a:p>
@@ -2665,7 +2670,7 @@
           <a:p>
             <a:fld id="{0DBDE24C-F83E-4B95-97D0-05E27B78EE15}" type="datetimeFigureOut">
               <a:rPr lang="en-US" smtClean="0"/>
-              <a:t>8/23/2023</a:t>
+              <a:t>6/19/26</a:t>
             </a:fld>
             <a:endParaRPr lang="en-US"/>
           </a:p>
@@ -2906,7 +2911,7 @@
           <a:p>
             <a:fld id="{0DBDE24C-F83E-4B95-97D0-05E27B78EE15}" type="datetimeFigureOut">
               <a:rPr lang="en-US" smtClean="0"/>
-              <a:t>8/23/2023</a:t>
+              <a:t>6/19/26</a:t>
             </a:fld>
             <a:endParaRPr lang="en-US"/>
           </a:p>
@@ -4618,7 +4623,7 @@
         </p:nvSpPr>
         <p:spPr>
           <a:xfrm>
-            <a:off x="4579744" y="2730436"/>
+            <a:off x="4579744" y="1044854"/>
             <a:ext cx="692559" cy="2384146"/>
           </a:xfrm>
           <a:prstGeom prst="rect">
@@ -4668,7 +4673,7 @@
         </p:nvSpPr>
         <p:spPr>
           <a:xfrm>
-            <a:off x="5459796" y="2730436"/>
+            <a:off x="5459796" y="1044854"/>
             <a:ext cx="692559" cy="2384146"/>
           </a:xfrm>
           <a:prstGeom prst="rect">
@@ -4718,7 +4723,7 @@
         </p:nvSpPr>
         <p:spPr>
           <a:xfrm>
-            <a:off x="7219901" y="2730436"/>
+            <a:off x="7219901" y="1044854"/>
             <a:ext cx="692559" cy="2384146"/>
           </a:xfrm>
           <a:prstGeom prst="rect">
@@ -4768,7 +4773,7 @@
         </p:nvSpPr>
         <p:spPr>
           <a:xfrm>
-            <a:off x="2819640" y="2730436"/>
+            <a:off x="2819640" y="1044854"/>
             <a:ext cx="692559" cy="2384146"/>
           </a:xfrm>
           <a:prstGeom prst="rect">
@@ -4818,7 +4823,7 @@
         </p:nvSpPr>
         <p:spPr>
           <a:xfrm>
-            <a:off x="3699692" y="2730436"/>
+            <a:off x="3699692" y="1044854"/>
             <a:ext cx="692559" cy="2384146"/>
           </a:xfrm>
           <a:prstGeom prst="rect">
@@ -4868,7 +4873,7 @@
         </p:nvSpPr>
         <p:spPr>
           <a:xfrm>
-            <a:off x="6339848" y="2730436"/>
+            <a:off x="6339848" y="1044854"/>
             <a:ext cx="692559" cy="2384146"/>
           </a:xfrm>
           <a:prstGeom prst="rect">
@@ -4876,6 +4881,306 @@
           </a:prstGeom>
           <a:solidFill>
             <a:srgbClr val="554467"/>
+          </a:solidFill>
+          <a:ln>
+            <a:noFill/>
+          </a:ln>
+        </p:spPr>
+        <p:style>
+          <a:lnRef idx="1">
+            <a:schemeClr val="accent1"/>
+          </a:lnRef>
+          <a:fillRef idx="3">
+            <a:schemeClr val="accent1"/>
+          </a:fillRef>
+          <a:effectRef idx="2">
+            <a:schemeClr val="accent1"/>
+          </a:effectRef>
+          <a:fontRef idx="minor">
+            <a:schemeClr val="lt1"/>
+          </a:fontRef>
+        </p:style>
+        <p:txBody>
+          <a:bodyPr rtlCol="0" anchor="ctr"/>
+          <a:lstStyle/>
+          <a:p>
+            <a:pPr algn="ctr"/>
+            <a:endParaRPr lang="en-US"/>
+          </a:p>
+        </p:txBody>
+      </p:sp>
+      <p:sp>
+        <p:nvSpPr>
+          <p:cNvPr id="5" name="Rectangle 4">
+            <a:extLst>
+              <a:ext uri="{FF2B5EF4-FFF2-40B4-BE49-F238E27FC236}">
+                <a16:creationId xmlns:a16="http://schemas.microsoft.com/office/drawing/2014/main" id="{151F0C36-E55E-ABB7-EA09-75C5B0CF001F}"/>
+              </a:ext>
+            </a:extLst>
+          </p:cNvPr>
+          <p:cNvSpPr/>
+          <p:nvPr/>
+        </p:nvSpPr>
+        <p:spPr>
+          <a:xfrm>
+            <a:off x="4579744" y="3922509"/>
+            <a:ext cx="692559" cy="2384146"/>
+          </a:xfrm>
+          <a:prstGeom prst="rect">
+            <a:avLst/>
+          </a:prstGeom>
+          <a:solidFill>
+            <a:srgbClr val="B509AC"/>
+          </a:solidFill>
+          <a:ln>
+            <a:noFill/>
+          </a:ln>
+        </p:spPr>
+        <p:style>
+          <a:lnRef idx="1">
+            <a:schemeClr val="accent1"/>
+          </a:lnRef>
+          <a:fillRef idx="3">
+            <a:schemeClr val="accent1"/>
+          </a:fillRef>
+          <a:effectRef idx="2">
+            <a:schemeClr val="accent1"/>
+          </a:effectRef>
+          <a:fontRef idx="minor">
+            <a:schemeClr val="lt1"/>
+          </a:fontRef>
+        </p:style>
+        <p:txBody>
+          <a:bodyPr rtlCol="0" anchor="ctr"/>
+          <a:lstStyle/>
+          <a:p>
+            <a:pPr algn="ctr"/>
+            <a:endParaRPr lang="en-US" dirty="0"/>
+          </a:p>
+        </p:txBody>
+      </p:sp>
+      <p:sp>
+        <p:nvSpPr>
+          <p:cNvPr id="6" name="Rectangle 5">
+            <a:extLst>
+              <a:ext uri="{FF2B5EF4-FFF2-40B4-BE49-F238E27FC236}">
+                <a16:creationId xmlns:a16="http://schemas.microsoft.com/office/drawing/2014/main" id="{58EC08EB-BF35-B47D-8EF9-06900638D123}"/>
+              </a:ext>
+            </a:extLst>
+          </p:cNvPr>
+          <p:cNvSpPr/>
+          <p:nvPr/>
+        </p:nvSpPr>
+        <p:spPr>
+          <a:xfrm>
+            <a:off x="5459796" y="3922509"/>
+            <a:ext cx="692559" cy="2384146"/>
+          </a:xfrm>
+          <a:prstGeom prst="rect">
+            <a:avLst/>
+          </a:prstGeom>
+          <a:solidFill>
+            <a:srgbClr val="42B983"/>
+          </a:solidFill>
+          <a:ln>
+            <a:noFill/>
+          </a:ln>
+        </p:spPr>
+        <p:style>
+          <a:lnRef idx="1">
+            <a:schemeClr val="accent1"/>
+          </a:lnRef>
+          <a:fillRef idx="3">
+            <a:schemeClr val="accent1"/>
+          </a:fillRef>
+          <a:effectRef idx="2">
+            <a:schemeClr val="accent1"/>
+          </a:effectRef>
+          <a:fontRef idx="minor">
+            <a:schemeClr val="lt1"/>
+          </a:fontRef>
+        </p:style>
+        <p:txBody>
+          <a:bodyPr rtlCol="0" anchor="ctr"/>
+          <a:lstStyle/>
+          <a:p>
+            <a:pPr algn="ctr"/>
+            <a:endParaRPr lang="en-US"/>
+          </a:p>
+        </p:txBody>
+      </p:sp>
+      <p:sp>
+        <p:nvSpPr>
+          <p:cNvPr id="7" name="Rectangle 6">
+            <a:extLst>
+              <a:ext uri="{FF2B5EF4-FFF2-40B4-BE49-F238E27FC236}">
+                <a16:creationId xmlns:a16="http://schemas.microsoft.com/office/drawing/2014/main" id="{08CB98C9-16CF-5B48-AB77-2BFDE1299046}"/>
+              </a:ext>
+            </a:extLst>
+          </p:cNvPr>
+          <p:cNvSpPr/>
+          <p:nvPr/>
+        </p:nvSpPr>
+        <p:spPr>
+          <a:xfrm>
+            <a:off x="7219901" y="3922509"/>
+            <a:ext cx="692559" cy="2384146"/>
+          </a:xfrm>
+          <a:prstGeom prst="rect">
+            <a:avLst/>
+          </a:prstGeom>
+          <a:solidFill>
+            <a:srgbClr val="E7C000"/>
+          </a:solidFill>
+          <a:ln>
+            <a:noFill/>
+          </a:ln>
+        </p:spPr>
+        <p:style>
+          <a:lnRef idx="1">
+            <a:schemeClr val="accent1"/>
+          </a:lnRef>
+          <a:fillRef idx="3">
+            <a:schemeClr val="accent1"/>
+          </a:fillRef>
+          <a:effectRef idx="2">
+            <a:schemeClr val="accent1"/>
+          </a:effectRef>
+          <a:fontRef idx="minor">
+            <a:schemeClr val="lt1"/>
+          </a:fontRef>
+        </p:style>
+        <p:txBody>
+          <a:bodyPr rtlCol="0" anchor="ctr"/>
+          <a:lstStyle/>
+          <a:p>
+            <a:pPr algn="ctr"/>
+            <a:endParaRPr lang="en-US"/>
+          </a:p>
+        </p:txBody>
+      </p:sp>
+      <p:sp>
+        <p:nvSpPr>
+          <p:cNvPr id="8" name="Rectangle 7">
+            <a:extLst>
+              <a:ext uri="{FF2B5EF4-FFF2-40B4-BE49-F238E27FC236}">
+                <a16:creationId xmlns:a16="http://schemas.microsoft.com/office/drawing/2014/main" id="{00728E6A-2DA3-2E46-967F-D67FEABDFF94}"/>
+              </a:ext>
+            </a:extLst>
+          </p:cNvPr>
+          <p:cNvSpPr/>
+          <p:nvPr/>
+        </p:nvSpPr>
+        <p:spPr>
+          <a:xfrm>
+            <a:off x="2819640" y="3922509"/>
+            <a:ext cx="692559" cy="2384146"/>
+          </a:xfrm>
+          <a:prstGeom prst="rect">
+            <a:avLst/>
+          </a:prstGeom>
+          <a:solidFill>
+            <a:srgbClr val="2698BA"/>
+          </a:solidFill>
+          <a:ln>
+            <a:noFill/>
+          </a:ln>
+        </p:spPr>
+        <p:style>
+          <a:lnRef idx="1">
+            <a:schemeClr val="accent1"/>
+          </a:lnRef>
+          <a:fillRef idx="3">
+            <a:schemeClr val="accent1"/>
+          </a:fillRef>
+          <a:effectRef idx="2">
+            <a:schemeClr val="accent1"/>
+          </a:effectRef>
+          <a:fontRef idx="minor">
+            <a:schemeClr val="lt1"/>
+          </a:fontRef>
+        </p:style>
+        <p:txBody>
+          <a:bodyPr rtlCol="0" anchor="ctr"/>
+          <a:lstStyle/>
+          <a:p>
+            <a:pPr algn="ctr"/>
+            <a:endParaRPr lang="en-US" dirty="0"/>
+          </a:p>
+        </p:txBody>
+      </p:sp>
+      <p:sp>
+        <p:nvSpPr>
+          <p:cNvPr id="9" name="Rectangle 8">
+            <a:extLst>
+              <a:ext uri="{FF2B5EF4-FFF2-40B4-BE49-F238E27FC236}">
+                <a16:creationId xmlns:a16="http://schemas.microsoft.com/office/drawing/2014/main" id="{51872472-A985-BF13-5749-DA295F0860D4}"/>
+              </a:ext>
+            </a:extLst>
+          </p:cNvPr>
+          <p:cNvSpPr/>
+          <p:nvPr/>
+        </p:nvSpPr>
+        <p:spPr>
+          <a:xfrm>
+            <a:off x="3699692" y="3922509"/>
+            <a:ext cx="692559" cy="2384146"/>
+          </a:xfrm>
+          <a:prstGeom prst="rect">
+            <a:avLst/>
+          </a:prstGeom>
+          <a:solidFill>
+            <a:srgbClr val="FD7E14"/>
+          </a:solidFill>
+          <a:ln>
+            <a:noFill/>
+          </a:ln>
+        </p:spPr>
+        <p:style>
+          <a:lnRef idx="1">
+            <a:schemeClr val="accent1"/>
+          </a:lnRef>
+          <a:fillRef idx="3">
+            <a:schemeClr val="accent1"/>
+          </a:fillRef>
+          <a:effectRef idx="2">
+            <a:schemeClr val="accent1"/>
+          </a:effectRef>
+          <a:fontRef idx="minor">
+            <a:schemeClr val="lt1"/>
+          </a:fontRef>
+        </p:style>
+        <p:txBody>
+          <a:bodyPr rtlCol="0" anchor="ctr"/>
+          <a:lstStyle/>
+          <a:p>
+            <a:pPr algn="ctr"/>
+            <a:endParaRPr lang="en-US"/>
+          </a:p>
+        </p:txBody>
+      </p:sp>
+      <p:sp>
+        <p:nvSpPr>
+          <p:cNvPr id="10" name="Rectangle 9">
+            <a:extLst>
+              <a:ext uri="{FF2B5EF4-FFF2-40B4-BE49-F238E27FC236}">
+                <a16:creationId xmlns:a16="http://schemas.microsoft.com/office/drawing/2014/main" id="{E072DAE6-D637-358C-39F6-FF43AA12ED29}"/>
+              </a:ext>
+            </a:extLst>
+          </p:cNvPr>
+          <p:cNvSpPr/>
+          <p:nvPr/>
+        </p:nvSpPr>
+        <p:spPr>
+          <a:xfrm>
+            <a:off x="6339848" y="3922509"/>
+            <a:ext cx="692559" cy="2384146"/>
+          </a:xfrm>
+          <a:prstGeom prst="rect">
+            <a:avLst/>
+          </a:prstGeom>
+          <a:solidFill>
+            <a:srgbClr val="6610F2"/>
           </a:solidFill>
           <a:ln>
             <a:noFill/>

--- a/docs/_templates/lilo_pallete.pptx
+++ b/docs/_templates/lilo_pallete.pptx
@@ -4955,7 +4955,10 @@
           <a:lstStyle/>
           <a:p>
             <a:pPr algn="ctr"/>
-            <a:endParaRPr lang="en-US" dirty="0"/>
+            <a:r>
+              <a:rPr lang="en-US" dirty="0"/>
+              <a:t>B509AC</a:t>
+            </a:r>
           </a:p>
         </p:txBody>
       </p:sp>
@@ -5105,7 +5108,10 @@
           <a:lstStyle/>
           <a:p>
             <a:pPr algn="ctr"/>
-            <a:endParaRPr lang="en-US" dirty="0"/>
+            <a:r>
+              <a:rPr lang="en-US" dirty="0"/>
+              <a:t>2698BA</a:t>
+            </a:r>
           </a:p>
         </p:txBody>
       </p:sp>

--- a/docs/_templates/lilo_pallete.pptx
+++ b/docs/_templates/lilo_pallete.pptx
@@ -4655,7 +4655,10 @@
           <a:lstStyle/>
           <a:p>
             <a:pPr algn="ctr"/>
-            <a:endParaRPr lang="en-US"/>
+            <a:r>
+              <a:rPr lang="en-US" dirty="0"/>
+              <a:t>771A35</a:t>
+            </a:r>
           </a:p>
         </p:txBody>
       </p:sp>
@@ -4705,7 +4708,10 @@
           <a:lstStyle/>
           <a:p>
             <a:pPr algn="ctr"/>
-            <a:endParaRPr lang="en-US"/>
+            <a:r>
+              <a:rPr lang="en-US" dirty="0"/>
+              <a:t>52899C</a:t>
+            </a:r>
           </a:p>
         </p:txBody>
       </p:sp>
@@ -4755,7 +4761,10 @@
           <a:lstStyle/>
           <a:p>
             <a:pPr algn="ctr"/>
-            <a:endParaRPr lang="en-US"/>
+            <a:r>
+              <a:rPr lang="en-US" dirty="0"/>
+              <a:t>6B3B39</a:t>
+            </a:r>
           </a:p>
         </p:txBody>
       </p:sp>
@@ -4805,7 +4814,10 @@
           <a:lstStyle/>
           <a:p>
             <a:pPr algn="ctr"/>
-            <a:endParaRPr lang="en-US" dirty="0"/>
+            <a:r>
+              <a:rPr lang="en-US" dirty="0"/>
+              <a:t>3D576E</a:t>
+            </a:r>
           </a:p>
         </p:txBody>
       </p:sp>
@@ -4855,7 +4867,10 @@
           <a:lstStyle/>
           <a:p>
             <a:pPr algn="ctr"/>
-            <a:endParaRPr lang="en-US"/>
+            <a:r>
+              <a:rPr lang="en-US" dirty="0"/>
+              <a:t>EB9B67</a:t>
+            </a:r>
           </a:p>
         </p:txBody>
       </p:sp>
@@ -4905,7 +4920,10 @@
           <a:lstStyle/>
           <a:p>
             <a:pPr algn="ctr"/>
-            <a:endParaRPr lang="en-US"/>
+            <a:r>
+              <a:rPr lang="en-US" dirty="0"/>
+              <a:t>554467</a:t>
+            </a:r>
           </a:p>
         </p:txBody>
       </p:sp>
@@ -5008,7 +5026,10 @@
           <a:lstStyle/>
           <a:p>
             <a:pPr algn="ctr"/>
-            <a:endParaRPr lang="en-US"/>
+            <a:r>
+              <a:rPr lang="en-US" dirty="0"/>
+              <a:t>42B983</a:t>
+            </a:r>
           </a:p>
         </p:txBody>
       </p:sp>
@@ -5058,7 +5079,10 @@
           <a:lstStyle/>
           <a:p>
             <a:pPr algn="ctr"/>
-            <a:endParaRPr lang="en-US"/>
+            <a:r>
+              <a:rPr lang="en-US" dirty="0"/>
+              <a:t>E7C000</a:t>
+            </a:r>
           </a:p>
         </p:txBody>
       </p:sp>
@@ -5161,7 +5185,10 @@
           <a:lstStyle/>
           <a:p>
             <a:pPr algn="ctr"/>
-            <a:endParaRPr lang="en-US"/>
+            <a:r>
+              <a:rPr lang="en-US" dirty="0"/>
+              <a:t>FD7E14</a:t>
+            </a:r>
           </a:p>
         </p:txBody>
       </p:sp>
@@ -5211,7 +5238,10 @@
           <a:lstStyle/>
           <a:p>
             <a:pPr algn="ctr"/>
-            <a:endParaRPr lang="en-US"/>
+            <a:r>
+              <a:rPr lang="en-US" dirty="0"/>
+              <a:t>6610F2</a:t>
+            </a:r>
           </a:p>
         </p:txBody>
       </p:sp>
